--- a/content/slides/project-explanation-20260822/output/gem-hunter.pptx
+++ b/content/slides/project-explanation-20260822/output/gem-hunter.pptx
@@ -24,6 +24,8 @@
     <p:sldId id="272" r:id="rId23"/>
     <p:sldId id="273" r:id="rId24"/>
     <p:sldId id="274" r:id="rId25"/>
+    <p:sldId id="275" r:id="rId26"/>
+    <p:sldId id="276" r:id="rId27"/>
   </p:sldIdLst>
   <p:sldSz cx="12192000" cy="6858000" type="screen4x3"/>
   <p:notesSz cx="6858000" cy="9144000"/>
@@ -3150,7 +3152,7 @@
       <p:grpSpPr/>
       <p:pic>
         <p:nvPicPr>
-          <p:cNvPr id="2" name="Picture 1" descr="new-04.jpg"/>
+          <p:cNvPr id="2" name="Picture 1" descr="new-03.jpg"/>
           <p:cNvPicPr>
             <a:picLocks noChangeAspect="1"/>
           </p:cNvPicPr>
@@ -3192,7 +3194,7 @@
       <p:grpSpPr/>
       <p:pic>
         <p:nvPicPr>
-          <p:cNvPr id="2" name="Picture 1" descr="11-testing-strategy.jpg"/>
+          <p:cNvPr id="2" name="Picture 1" descr="new-04.jpg"/>
           <p:cNvPicPr>
             <a:picLocks noChangeAspect="1"/>
           </p:cNvPicPr>
@@ -3234,7 +3236,7 @@
       <p:grpSpPr/>
       <p:pic>
         <p:nvPicPr>
-          <p:cNvPr id="2" name="Picture 1" descr="new-05.jpg"/>
+          <p:cNvPr id="2" name="Picture 1" descr="11-testing-strategy.jpg"/>
           <p:cNvPicPr>
             <a:picLocks noChangeAspect="1"/>
           </p:cNvPicPr>
@@ -3276,7 +3278,7 @@
       <p:grpSpPr/>
       <p:pic>
         <p:nvPicPr>
-          <p:cNvPr id="2" name="Picture 1" descr="new-12.jpg"/>
+          <p:cNvPr id="2" name="Picture 1" descr="new-05.jpg"/>
           <p:cNvPicPr>
             <a:picLocks noChangeAspect="1"/>
           </p:cNvPicPr>
@@ -3318,7 +3320,7 @@
       <p:grpSpPr/>
       <p:pic>
         <p:nvPicPr>
-          <p:cNvPr id="2" name="Picture 1" descr="new-13.jpg"/>
+          <p:cNvPr id="2" name="Picture 1" descr="new-12.jpg"/>
           <p:cNvPicPr>
             <a:picLocks noChangeAspect="1"/>
           </p:cNvPicPr>
@@ -3360,7 +3362,7 @@
       <p:grpSpPr/>
       <p:pic>
         <p:nvPicPr>
-          <p:cNvPr id="2" name="Picture 1" descr="10-gem-score.jpg"/>
+          <p:cNvPr id="2" name="Picture 1" descr="new-13.jpg"/>
           <p:cNvPicPr>
             <a:picLocks noChangeAspect="1"/>
           </p:cNvPicPr>
@@ -3402,7 +3404,7 @@
       <p:grpSpPr/>
       <p:pic>
         <p:nvPicPr>
-          <p:cNvPr id="2" name="Picture 1" descr="new-06.jpg"/>
+          <p:cNvPr id="2" name="Picture 1" descr="new-15.jpg"/>
           <p:cNvPicPr>
             <a:picLocks noChangeAspect="1"/>
           </p:cNvPicPr>
@@ -3444,7 +3446,7 @@
       <p:grpSpPr/>
       <p:pic>
         <p:nvPicPr>
-          <p:cNvPr id="2" name="Picture 1" descr="new-07.jpg"/>
+          <p:cNvPr id="2" name="Picture 1" descr="new-06.jpg"/>
           <p:cNvPicPr>
             <a:picLocks noChangeAspect="1"/>
           </p:cNvPicPr>
@@ -3486,7 +3488,7 @@
       <p:grpSpPr/>
       <p:pic>
         <p:nvPicPr>
-          <p:cNvPr id="2" name="Picture 1" descr="new-08.jpg"/>
+          <p:cNvPr id="2" name="Picture 1" descr="new-14.jpg"/>
           <p:cNvPicPr>
             <a:picLocks noChangeAspect="1"/>
           </p:cNvPicPr>
@@ -3528,7 +3530,7 @@
       <p:grpSpPr/>
       <p:pic>
         <p:nvPicPr>
-          <p:cNvPr id="2" name="Picture 1" descr="new-09.jpg"/>
+          <p:cNvPr id="2" name="Picture 1" descr="new-07.jpg"/>
           <p:cNvPicPr>
             <a:picLocks noChangeAspect="1"/>
           </p:cNvPicPr>
@@ -3600,7 +3602,133 @@
 </p:sld>
 </file>
 
+<file path=ppt/slides/slide20.xml><?xml version="1.0" encoding="utf-8"?>
+<p:sld xmlns:a="http://schemas.openxmlformats.org/drawingml/2006/main" xmlns:p="http://schemas.openxmlformats.org/presentationml/2006/main" xmlns:r="http://schemas.openxmlformats.org/officeDocument/2006/relationships">
+  <p:cSld>
+    <p:spTree>
+      <p:nvGrpSpPr>
+        <p:cNvPr id="1" name=""/>
+        <p:cNvGrpSpPr/>
+        <p:nvPr/>
+      </p:nvGrpSpPr>
+      <p:grpSpPr/>
+      <p:pic>
+        <p:nvPicPr>
+          <p:cNvPr id="2" name="Picture 1" descr="new-08.jpg"/>
+          <p:cNvPicPr>
+            <a:picLocks noChangeAspect="1"/>
+          </p:cNvPicPr>
+          <p:nvPr/>
+        </p:nvPicPr>
+        <p:blipFill>
+          <a:blip r:embed="rId2"/>
+          <a:stretch>
+            <a:fillRect/>
+          </a:stretch>
+        </p:blipFill>
+        <p:spPr>
+          <a:xfrm>
+            <a:off x="0" y="0"/>
+            <a:ext cx="12192000" cy="6858000"/>
+          </a:xfrm>
+          <a:prstGeom prst="rect">
+            <a:avLst/>
+          </a:prstGeom>
+        </p:spPr>
+      </p:pic>
+    </p:spTree>
+  </p:cSld>
+  <p:clrMapOvr>
+    <a:masterClrMapping/>
+  </p:clrMapOvr>
+</p:sld>
+</file>
+
+<file path=ppt/slides/slide21.xml><?xml version="1.0" encoding="utf-8"?>
+<p:sld xmlns:a="http://schemas.openxmlformats.org/drawingml/2006/main" xmlns:p="http://schemas.openxmlformats.org/presentationml/2006/main" xmlns:r="http://schemas.openxmlformats.org/officeDocument/2006/relationships">
+  <p:cSld>
+    <p:spTree>
+      <p:nvGrpSpPr>
+        <p:cNvPr id="1" name=""/>
+        <p:cNvGrpSpPr/>
+        <p:nvPr/>
+      </p:nvGrpSpPr>
+      <p:grpSpPr/>
+      <p:pic>
+        <p:nvPicPr>
+          <p:cNvPr id="2" name="Picture 1" descr="new-09.jpg"/>
+          <p:cNvPicPr>
+            <a:picLocks noChangeAspect="1"/>
+          </p:cNvPicPr>
+          <p:nvPr/>
+        </p:nvPicPr>
+        <p:blipFill>
+          <a:blip r:embed="rId2"/>
+          <a:stretch>
+            <a:fillRect/>
+          </a:stretch>
+        </p:blipFill>
+        <p:spPr>
+          <a:xfrm>
+            <a:off x="0" y="0"/>
+            <a:ext cx="12192000" cy="6858000"/>
+          </a:xfrm>
+          <a:prstGeom prst="rect">
+            <a:avLst/>
+          </a:prstGeom>
+        </p:spPr>
+      </p:pic>
+    </p:spTree>
+  </p:cSld>
+  <p:clrMapOvr>
+    <a:masterClrMapping/>
+  </p:clrMapOvr>
+</p:sld>
+</file>
+
 <file path=ppt/slides/slide3.xml><?xml version="1.0" encoding="utf-8"?>
+<p:sld xmlns:a="http://schemas.openxmlformats.org/drawingml/2006/main" xmlns:p="http://schemas.openxmlformats.org/presentationml/2006/main" xmlns:r="http://schemas.openxmlformats.org/officeDocument/2006/relationships">
+  <p:cSld>
+    <p:spTree>
+      <p:nvGrpSpPr>
+        <p:cNvPr id="1" name=""/>
+        <p:cNvGrpSpPr/>
+        <p:nvPr/>
+      </p:nvGrpSpPr>
+      <p:grpSpPr/>
+      <p:pic>
+        <p:nvPicPr>
+          <p:cNvPr id="2" name="Picture 1" descr="shot-03.jpg"/>
+          <p:cNvPicPr>
+            <a:picLocks noChangeAspect="1"/>
+          </p:cNvPicPr>
+          <p:nvPr/>
+        </p:nvPicPr>
+        <p:blipFill>
+          <a:blip r:embed="rId2"/>
+          <a:stretch>
+            <a:fillRect/>
+          </a:stretch>
+        </p:blipFill>
+        <p:spPr>
+          <a:xfrm>
+            <a:off x="0" y="0"/>
+            <a:ext cx="12192000" cy="6858000"/>
+          </a:xfrm>
+          <a:prstGeom prst="rect">
+            <a:avLst/>
+          </a:prstGeom>
+        </p:spPr>
+      </p:pic>
+    </p:spTree>
+  </p:cSld>
+  <p:clrMapOvr>
+    <a:masterClrMapping/>
+  </p:clrMapOvr>
+</p:sld>
+</file>
+
+<file path=ppt/slides/slide4.xml><?xml version="1.0" encoding="utf-8"?>
 <p:sld xmlns:a="http://schemas.openxmlformats.org/drawingml/2006/main" xmlns:p="http://schemas.openxmlformats.org/presentationml/2006/main" xmlns:r="http://schemas.openxmlformats.org/officeDocument/2006/relationships">
   <p:cSld>
     <p:spTree>
@@ -3642,7 +3770,7 @@
 </p:sld>
 </file>
 
-<file path=ppt/slides/slide4.xml><?xml version="1.0" encoding="utf-8"?>
+<file path=ppt/slides/slide5.xml><?xml version="1.0" encoding="utf-8"?>
 <p:sld xmlns:a="http://schemas.openxmlformats.org/drawingml/2006/main" xmlns:p="http://schemas.openxmlformats.org/presentationml/2006/main" xmlns:r="http://schemas.openxmlformats.org/officeDocument/2006/relationships">
   <p:cSld>
     <p:spTree>
@@ -3684,7 +3812,7 @@
 </p:sld>
 </file>
 
-<file path=ppt/slides/slide5.xml><?xml version="1.0" encoding="utf-8"?>
+<file path=ppt/slides/slide6.xml><?xml version="1.0" encoding="utf-8"?>
 <p:sld xmlns:a="http://schemas.openxmlformats.org/drawingml/2006/main" xmlns:p="http://schemas.openxmlformats.org/presentationml/2006/main" xmlns:r="http://schemas.openxmlformats.org/officeDocument/2006/relationships">
   <p:cSld>
     <p:spTree>
@@ -3726,7 +3854,7 @@
 </p:sld>
 </file>
 
-<file path=ppt/slides/slide6.xml><?xml version="1.0" encoding="utf-8"?>
+<file path=ppt/slides/slide7.xml><?xml version="1.0" encoding="utf-8"?>
 <p:sld xmlns:a="http://schemas.openxmlformats.org/drawingml/2006/main" xmlns:p="http://schemas.openxmlformats.org/presentationml/2006/main" xmlns:r="http://schemas.openxmlformats.org/officeDocument/2006/relationships">
   <p:cSld>
     <p:spTree>
@@ -3768,7 +3896,7 @@
 </p:sld>
 </file>
 
-<file path=ppt/slides/slide7.xml><?xml version="1.0" encoding="utf-8"?>
+<file path=ppt/slides/slide8.xml><?xml version="1.0" encoding="utf-8"?>
 <p:sld xmlns:a="http://schemas.openxmlformats.org/drawingml/2006/main" xmlns:p="http://schemas.openxmlformats.org/presentationml/2006/main" xmlns:r="http://schemas.openxmlformats.org/officeDocument/2006/relationships">
   <p:cSld>
     <p:spTree>
@@ -3810,7 +3938,7 @@
 </p:sld>
 </file>
 
-<file path=ppt/slides/slide8.xml><?xml version="1.0" encoding="utf-8"?>
+<file path=ppt/slides/slide9.xml><?xml version="1.0" encoding="utf-8"?>
 <p:sld xmlns:a="http://schemas.openxmlformats.org/drawingml/2006/main" xmlns:p="http://schemas.openxmlformats.org/presentationml/2006/main" xmlns:r="http://schemas.openxmlformats.org/officeDocument/2006/relationships">
   <p:cSld>
     <p:spTree>
@@ -3823,48 +3951,6 @@
       <p:pic>
         <p:nvPicPr>
           <p:cNvPr id="2" name="Picture 1" descr="12-cloudflare.jpg"/>
-          <p:cNvPicPr>
-            <a:picLocks noChangeAspect="1"/>
-          </p:cNvPicPr>
-          <p:nvPr/>
-        </p:nvPicPr>
-        <p:blipFill>
-          <a:blip r:embed="rId2"/>
-          <a:stretch>
-            <a:fillRect/>
-          </a:stretch>
-        </p:blipFill>
-        <p:spPr>
-          <a:xfrm>
-            <a:off x="0" y="0"/>
-            <a:ext cx="12192000" cy="6858000"/>
-          </a:xfrm>
-          <a:prstGeom prst="rect">
-            <a:avLst/>
-          </a:prstGeom>
-        </p:spPr>
-      </p:pic>
-    </p:spTree>
-  </p:cSld>
-  <p:clrMapOvr>
-    <a:masterClrMapping/>
-  </p:clrMapOvr>
-</p:sld>
-</file>
-
-<file path=ppt/slides/slide9.xml><?xml version="1.0" encoding="utf-8"?>
-<p:sld xmlns:a="http://schemas.openxmlformats.org/drawingml/2006/main" xmlns:p="http://schemas.openxmlformats.org/presentationml/2006/main" xmlns:r="http://schemas.openxmlformats.org/officeDocument/2006/relationships">
-  <p:cSld>
-    <p:spTree>
-      <p:nvGrpSpPr>
-        <p:cNvPr id="1" name=""/>
-        <p:cNvGrpSpPr/>
-        <p:nvPr/>
-      </p:nvGrpSpPr>
-      <p:grpSpPr/>
-      <p:pic>
-        <p:nvPicPr>
-          <p:cNvPr id="2" name="Picture 1" descr="new-03.jpg"/>
           <p:cNvPicPr>
             <a:picLocks noChangeAspect="1"/>
           </p:cNvPicPr>

--- a/content/slides/project-explanation-20260822/output/gem-hunter.pptx
+++ b/content/slides/project-explanation-20260822/output/gem-hunter.pptx
@@ -3824,7 +3824,7 @@
       <p:grpSpPr/>
       <p:pic>
         <p:nvPicPr>
-          <p:cNvPr id="2" name="Picture 1" descr="08-doc-relations.jpg"/>
+          <p:cNvPr id="2" name="Picture 1" descr="new-10.jpg"/>
           <p:cNvPicPr>
             <a:picLocks noChangeAspect="1"/>
           </p:cNvPicPr>
